--- a/docs/video-scripts/slides/pptx/module-4/lesson-4-2-data-analysis.pptx
+++ b/docs/video-scripts/slides/pptx/module-4/lesson-4-2-data-analysis.pptx
@@ -8,6 +8,7 @@
     <p:sldId id="256" r:id="rId7"/>
     <p:sldId id="257" r:id="rId8"/>
     <p:sldId id="258" r:id="rId9"/>
+    <p:sldId id="259" r:id="rId10"/>
   </p:sldIdLst>
   <p:sldSz cx="14630400" cy="8229600" type="screen4x3"/>
   <p:notesSz cx="6858000" cy="9144000"/>
@@ -3170,7 +3171,7 @@
               </a:lnSpc>
             </a:pPr>
             <a:r>
-              <a:rPr sz="1400" b="1">
+              <a:rPr sz="1400" b="1" i="0">
                 <a:solidFill>
                   <a:srgbClr val="2B6E2B"/>
                 </a:solidFill>
@@ -3209,7 +3210,7 @@
               </a:lnSpc>
             </a:pPr>
             <a:r>
-              <a:rPr sz="5400" b="1">
+              <a:rPr sz="5400" b="1" i="0">
                 <a:solidFill>
                   <a:srgbClr val="030303"/>
                 </a:solidFill>
@@ -3248,13 +3249,13 @@
               </a:lnSpc>
             </a:pPr>
             <a:r>
-              <a:rPr sz="2200" b="0">
+              <a:rPr sz="2200" b="0" i="0">
                 <a:solidFill>
                   <a:srgbClr val="272525"/>
                 </a:solidFill>
                 <a:latin typeface="Inter"/>
               </a:rPr>
-              <a:t>Your on-call analyst.</a:t>
+              <a:t>32 hypothetical projects. One question. Your on-call analyst.</a:t>
             </a:r>
           </a:p>
         </p:txBody>
@@ -3287,7 +3288,7 @@
               </a:lnSpc>
             </a:pPr>
             <a:r>
-              <a:rPr sz="1100" b="1">
+              <a:rPr sz="1100" b="1" i="0">
                 <a:solidFill>
                   <a:srgbClr val="2B6E2B"/>
                 </a:solidFill>
@@ -3352,7 +3353,7 @@
               </a:lnSpc>
             </a:pPr>
             <a:r>
-              <a:rPr sz="1200" b="1">
+              <a:rPr sz="1200" b="1" i="0">
                 <a:solidFill>
                   <a:srgbClr val="2B6E2B"/>
                 </a:solidFill>
@@ -3391,7 +3392,7 @@
               </a:lnSpc>
             </a:pPr>
             <a:r>
-              <a:rPr sz="4200" b="1">
+              <a:rPr sz="4200" b="1" i="0">
                 <a:solidFill>
                   <a:srgbClr val="030303"/>
                 </a:solidFill>
@@ -3474,7 +3475,7 @@
               </a:lnSpc>
             </a:pPr>
             <a:r>
-              <a:rPr sz="2200" b="0">
+              <a:rPr sz="2200" b="0" i="0">
                 <a:solidFill>
                   <a:srgbClr val="272525"/>
                 </a:solidFill>
@@ -3490,7 +3491,7 @@
               </a:lnSpc>
             </a:pPr>
             <a:r>
-              <a:rPr sz="2200" b="0">
+              <a:rPr sz="2200" b="0" i="0">
                 <a:solidFill>
                   <a:srgbClr val="272525"/>
                 </a:solidFill>
@@ -3506,7 +3507,7 @@
               </a:lnSpc>
             </a:pPr>
             <a:r>
-              <a:rPr sz="2200" b="0">
+              <a:rPr sz="2200" b="0" i="0">
                 <a:solidFill>
                   <a:srgbClr val="272525"/>
                 </a:solidFill>
@@ -3551,6 +3552,261 @@
         </p:nvSpPr>
         <p:spPr>
           <a:xfrm>
+            <a:off x="795528" y="640080"/>
+            <a:ext cx="9262872" cy="365760"/>
+          </a:xfrm>
+          <a:prstGeom prst="rect">
+            <a:avLst/>
+          </a:prstGeom>
+          <a:noFill/>
+        </p:spPr>
+        <p:txBody>
+          <a:bodyPr wrap="square" lIns="0" rIns="0" tIns="0" bIns="0" anchor="t">
+            <a:spAutoFit/>
+          </a:bodyPr>
+          <a:lstStyle/>
+          <a:p>
+            <a:pPr algn="l">
+              <a:lnSpc>
+                <a:spcPct val="115000"/>
+              </a:lnSpc>
+            </a:pPr>
+            <a:r>
+              <a:rPr sz="1200" b="1" i="0">
+                <a:solidFill>
+                  <a:srgbClr val="2B6E2B"/>
+                </a:solidFill>
+                <a:latin typeface="Inter"/>
+              </a:rPr>
+              <a:t>COPILOT IN EXCEL — LIVE</a:t>
+            </a:r>
+          </a:p>
+        </p:txBody>
+      </p:sp>
+      <p:sp>
+        <p:nvSpPr>
+          <p:cNvPr id="3" name="TextBox 2"/>
+          <p:cNvSpPr txBox="1"/>
+          <p:nvPr/>
+        </p:nvSpPr>
+        <p:spPr>
+          <a:xfrm>
+            <a:off x="795528" y="1051560"/>
+            <a:ext cx="9262872" cy="1005840"/>
+          </a:xfrm>
+          <a:prstGeom prst="rect">
+            <a:avLst/>
+          </a:prstGeom>
+          <a:noFill/>
+        </p:spPr>
+        <p:txBody>
+          <a:bodyPr wrap="square" lIns="0" rIns="0" tIns="0" bIns="0" anchor="t">
+            <a:spAutoFit/>
+          </a:bodyPr>
+          <a:lstStyle/>
+          <a:p>
+            <a:pPr algn="l">
+              <a:lnSpc>
+                <a:spcPct val="105000"/>
+              </a:lnSpc>
+            </a:pPr>
+            <a:r>
+              <a:rPr sz="3000" b="1" i="0">
+                <a:solidFill>
+                  <a:srgbClr val="030303"/>
+                </a:solidFill>
+                <a:latin typeface="Petrona"/>
+              </a:rPr>
+              <a:t>Cost overrun drivers, in seconds.</a:t>
+            </a:r>
+          </a:p>
+        </p:txBody>
+      </p:sp>
+      <p:sp>
+        <p:nvSpPr>
+          <p:cNvPr id="4" name="Rectangle 3"/>
+          <p:cNvSpPr/>
+          <p:nvPr/>
+        </p:nvSpPr>
+        <p:spPr>
+          <a:xfrm>
+            <a:off x="685800" y="2130552"/>
+            <a:ext cx="9482328" cy="3390746"/>
+          </a:xfrm>
+          <a:prstGeom prst="rect">
+            <a:avLst/>
+          </a:prstGeom>
+          <a:solidFill>
+            <a:srgbClr val="FFFFFF"/>
+          </a:solidFill>
+          <a:ln>
+            <a:noFill/>
+          </a:ln>
+          <a:effectLst/>
+        </p:spPr>
+        <p:style>
+          <a:lnRef idx="1">
+            <a:schemeClr val="accent1"/>
+          </a:lnRef>
+          <a:fillRef idx="3">
+            <a:schemeClr val="accent1"/>
+          </a:fillRef>
+          <a:effectRef idx="2">
+            <a:schemeClr val="accent1"/>
+          </a:effectRef>
+          <a:fontRef idx="minor">
+            <a:schemeClr val="lt1"/>
+          </a:fontRef>
+        </p:style>
+        <p:txBody>
+          <a:bodyPr rtlCol="0" anchor="ctr"/>
+          <a:lstStyle/>
+          <a:p>
+            <a:pPr algn="ctr"/>
+          </a:p>
+        </p:txBody>
+      </p:sp>
+      <p:sp>
+        <p:nvSpPr>
+          <p:cNvPr id="5" name="Rectangle 4"/>
+          <p:cNvSpPr/>
+          <p:nvPr/>
+        </p:nvSpPr>
+        <p:spPr>
+          <a:xfrm>
+            <a:off x="685800" y="5521298"/>
+            <a:ext cx="9482328" cy="36576"/>
+          </a:xfrm>
+          <a:prstGeom prst="rect">
+            <a:avLst/>
+          </a:prstGeom>
+          <a:solidFill>
+            <a:srgbClr val="2B6E2B"/>
+          </a:solidFill>
+          <a:ln>
+            <a:noFill/>
+          </a:ln>
+          <a:effectLst/>
+        </p:spPr>
+        <p:style>
+          <a:lnRef idx="1">
+            <a:schemeClr val="accent1"/>
+          </a:lnRef>
+          <a:fillRef idx="3">
+            <a:schemeClr val="accent1"/>
+          </a:fillRef>
+          <a:effectRef idx="2">
+            <a:schemeClr val="accent1"/>
+          </a:effectRef>
+          <a:fontRef idx="minor">
+            <a:schemeClr val="lt1"/>
+          </a:fontRef>
+        </p:style>
+        <p:txBody>
+          <a:bodyPr rtlCol="0" anchor="ctr"/>
+          <a:lstStyle/>
+          <a:p>
+            <a:pPr algn="ctr"/>
+          </a:p>
+        </p:txBody>
+      </p:sp>
+      <p:pic>
+        <p:nvPicPr>
+          <p:cNvPr id="6" name="Picture 5" descr="copilot-excel-cost-overrun-drivers.png"/>
+          <p:cNvPicPr>
+            <a:picLocks noChangeAspect="1"/>
+          </p:cNvPicPr>
+          <p:nvPr/>
+        </p:nvPicPr>
+        <p:blipFill>
+          <a:blip r:embed="rId2"/>
+          <a:stretch>
+            <a:fillRect/>
+          </a:stretch>
+        </p:blipFill>
+        <p:spPr>
+          <a:xfrm>
+            <a:off x="795528" y="2240280"/>
+            <a:ext cx="9262872" cy="3171290"/>
+          </a:xfrm>
+          <a:prstGeom prst="rect">
+            <a:avLst/>
+          </a:prstGeom>
+        </p:spPr>
+      </p:pic>
+      <p:sp>
+        <p:nvSpPr>
+          <p:cNvPr id="7" name="TextBox 6"/>
+          <p:cNvSpPr txBox="1"/>
+          <p:nvPr/>
+        </p:nvSpPr>
+        <p:spPr>
+          <a:xfrm>
+            <a:off x="795528" y="5823050"/>
+            <a:ext cx="9262872" cy="640080"/>
+          </a:xfrm>
+          <a:prstGeom prst="rect">
+            <a:avLst/>
+          </a:prstGeom>
+          <a:noFill/>
+        </p:spPr>
+        <p:txBody>
+          <a:bodyPr wrap="square" lIns="0" rIns="0" tIns="0" bIns="0" anchor="t">
+            <a:spAutoFit/>
+          </a:bodyPr>
+          <a:lstStyle/>
+          <a:p>
+            <a:pPr algn="l">
+              <a:lnSpc>
+                <a:spcPct val="130000"/>
+              </a:lnSpc>
+            </a:pPr>
+            <a:r>
+              <a:rPr sz="1400" b="0" i="1">
+                <a:solidFill>
+                  <a:srgbClr val="6B6B6B"/>
+                </a:solidFill>
+                <a:latin typeface="Inter"/>
+              </a:rPr>
+              <a:t>Copilot in Excel built the Summary by Project Type, the Cost Overrun Drivers table, and the risk profile column from one prompt. Read it — but always verify the numbers tie back to the source rows.</a:t>
+            </a:r>
+          </a:p>
+        </p:txBody>
+      </p:sp>
+    </p:spTree>
+  </p:cSld>
+  <p:clrMapOvr>
+    <a:masterClrMapping/>
+  </p:clrMapOvr>
+</p:sld>
+</file>
+
+<file path=ppt/slides/slide4.xml><?xml version="1.0" encoding="utf-8"?>
+<p:sld xmlns:a="http://schemas.openxmlformats.org/drawingml/2006/main" xmlns:p="http://schemas.openxmlformats.org/presentationml/2006/main" xmlns:r="http://schemas.openxmlformats.org/officeDocument/2006/relationships">
+  <p:cSld>
+    <p:bg>
+      <p:bgPr>
+        <a:solidFill>
+          <a:srgbClr val="FDFAF7"/>
+        </a:solidFill>
+        <a:effectLst/>
+      </p:bgPr>
+    </p:bg>
+    <p:spTree>
+      <p:nvGrpSpPr>
+        <p:cNvPr id="1" name=""/>
+        <p:cNvGrpSpPr/>
+        <p:nvPr/>
+      </p:nvGrpSpPr>
+      <p:grpSpPr/>
+      <p:sp>
+        <p:nvSpPr>
+          <p:cNvPr id="2" name="TextBox 1"/>
+          <p:cNvSpPr txBox="1"/>
+          <p:nvPr/>
+        </p:nvSpPr>
+        <p:spPr>
+          <a:xfrm>
             <a:off x="795528" y="822960"/>
             <a:ext cx="9262872" cy="365760"/>
           </a:xfrm>
@@ -3571,7 +3827,7 @@
               </a:lnSpc>
             </a:pPr>
             <a:r>
-              <a:rPr sz="1200" b="1">
+              <a:rPr sz="1200" b="1" i="0">
                 <a:solidFill>
                   <a:srgbClr val="2B6E2B"/>
                 </a:solidFill>
@@ -3610,7 +3866,7 @@
               </a:lnSpc>
             </a:pPr>
             <a:r>
-              <a:rPr sz="4200" b="1">
+              <a:rPr sz="4200" b="1" i="0">
                 <a:solidFill>
                   <a:srgbClr val="030303"/>
                 </a:solidFill>
@@ -3737,13 +3993,13 @@
               </a:lnSpc>
             </a:pPr>
             <a:r>
-              <a:rPr sz="2600" b="1">
+              <a:rPr sz="2600" b="1" i="0">
                 <a:solidFill>
                   <a:srgbClr val="030303"/>
                 </a:solidFill>
                 <a:latin typeface="Petrona"/>
               </a:rPr>
-              <a:t>50 projects across 4 categories isn't enough for regression.</a:t>
+              <a:t>32 projects across 4 categories isn't enough for regression.</a:t>
             </a:r>
           </a:p>
           <a:p>
@@ -3753,7 +4009,7 @@
               </a:lnSpc>
             </a:pPr>
             <a:r>
-              <a:rPr sz="2600" b="1">
+              <a:rPr sz="2600" b="1" i="0">
                 <a:solidFill>
                   <a:srgbClr val="030303"/>
                 </a:solidFill>
